--- a/EsercizioLez3.3.pptx
+++ b/EsercizioLez3.3.pptx
@@ -7,6 +7,10 @@
   <p:sldIdLst>
     <p:sldId id="258" r:id="rId2"/>
     <p:sldId id="260" r:id="rId3"/>
+    <p:sldId id="262" r:id="rId4"/>
+    <p:sldId id="263" r:id="rId5"/>
+    <p:sldId id="264" r:id="rId6"/>
+    <p:sldId id="265" r:id="rId7"/>
   </p:sldIdLst>
   <p:sldSz cx="12192000" cy="6858000"/>
   <p:notesSz cx="6858000" cy="9144000"/>
@@ -105,6 +109,11 @@
       </a:defRPr>
     </a:lvl9pPr>
   </p:defaultTextStyle>
+  <p:extLst>
+    <p:ext uri="{EFAFB233-063F-42B5-8137-9DF3F51BA10A}">
+      <p15:sldGuideLst xmlns:p15="http://schemas.microsoft.com/office/powerpoint/2012/main"/>
+    </p:ext>
+  </p:extLst>
 </p:presentation>
 </file>
 
@@ -112,8 +121,8 @@
 <pc:chgInfo xmlns:a="http://schemas.openxmlformats.org/drawingml/2006/main" xmlns:r="http://schemas.openxmlformats.org/officeDocument/2006/relationships" xmlns:ac="http://schemas.microsoft.com/office/drawing/2013/main/command" xmlns:pc="http://schemas.microsoft.com/office/powerpoint/2013/main/command">
   <pc:docChgLst>
     <pc:chgData name="Alessandro Di Piazza" userId="242384fd-1746-4b70-8d90-c83f4330e5ed" providerId="ADAL" clId="{FFF1DA74-BEAE-470B-8D8A-B7A1F3E1BF85}"/>
-    <pc:docChg chg="custSel addSld delSld modSld">
-      <pc:chgData name="Alessandro Di Piazza" userId="242384fd-1746-4b70-8d90-c83f4330e5ed" providerId="ADAL" clId="{FFF1DA74-BEAE-470B-8D8A-B7A1F3E1BF85}" dt="2026-05-29T14:28:47.381" v="100" actId="2696"/>
+    <pc:docChg chg="undo custSel addSld delSld modSld sldOrd">
+      <pc:chgData name="Alessandro Di Piazza" userId="242384fd-1746-4b70-8d90-c83f4330e5ed" providerId="ADAL" clId="{FFF1DA74-BEAE-470B-8D8A-B7A1F3E1BF85}" dt="2026-06-03T15:08:25.498" v="170" actId="2696"/>
       <pc:docMkLst>
         <pc:docMk/>
       </pc:docMkLst>
@@ -132,7 +141,7 @@
         </pc:sldMkLst>
       </pc:sldChg>
       <pc:sldChg chg="modSp add mod">
-        <pc:chgData name="Alessandro Di Piazza" userId="242384fd-1746-4b70-8d90-c83f4330e5ed" providerId="ADAL" clId="{FFF1DA74-BEAE-470B-8D8A-B7A1F3E1BF85}" dt="2026-05-29T14:28:42.219" v="99" actId="113"/>
+        <pc:chgData name="Alessandro Di Piazza" userId="242384fd-1746-4b70-8d90-c83f4330e5ed" providerId="ADAL" clId="{FFF1DA74-BEAE-470B-8D8A-B7A1F3E1BF85}" dt="2026-06-03T14:07:52.326" v="169" actId="27636"/>
         <pc:sldMkLst>
           <pc:docMk/>
           <pc:sldMk cId="1849798557" sldId="260"/>
@@ -146,7 +155,7 @@
           </ac:spMkLst>
         </pc:spChg>
         <pc:spChg chg="mod">
-          <ac:chgData name="Alessandro Di Piazza" userId="242384fd-1746-4b70-8d90-c83f4330e5ed" providerId="ADAL" clId="{FFF1DA74-BEAE-470B-8D8A-B7A1F3E1BF85}" dt="2026-05-29T14:28:42.219" v="99" actId="113"/>
+          <ac:chgData name="Alessandro Di Piazza" userId="242384fd-1746-4b70-8d90-c83f4330e5ed" providerId="ADAL" clId="{FFF1DA74-BEAE-470B-8D8A-B7A1F3E1BF85}" dt="2026-06-03T14:07:52.326" v="169" actId="27636"/>
           <ac:spMkLst>
             <pc:docMk/>
             <pc:sldMk cId="1849798557" sldId="260"/>
@@ -167,12 +176,27 @@
           <pc:docMk/>
           <pc:sldMk cId="77612620" sldId="261"/>
         </pc:sldMkLst>
-        <pc:spChg chg="add del mod">
-          <ac:chgData name="Alessandro Di Piazza" userId="242384fd-1746-4b70-8d90-c83f4330e5ed" providerId="ADAL" clId="{FFF1DA74-BEAE-470B-8D8A-B7A1F3E1BF85}" dt="2026-05-29T14:26:49.749" v="12"/>
+      </pc:sldChg>
+      <pc:sldChg chg="modSp new del mod">
+        <pc:chgData name="Alessandro Di Piazza" userId="242384fd-1746-4b70-8d90-c83f4330e5ed" providerId="ADAL" clId="{FFF1DA74-BEAE-470B-8D8A-B7A1F3E1BF85}" dt="2026-06-03T15:08:25.498" v="170" actId="2696"/>
+        <pc:sldMkLst>
+          <pc:docMk/>
+          <pc:sldMk cId="521350829" sldId="261"/>
+        </pc:sldMkLst>
+        <pc:spChg chg="mod">
+          <ac:chgData name="Alessandro Di Piazza" userId="242384fd-1746-4b70-8d90-c83f4330e5ed" providerId="ADAL" clId="{FFF1DA74-BEAE-470B-8D8A-B7A1F3E1BF85}" dt="2026-06-03T13:43:53.279" v="109" actId="20577"/>
           <ac:spMkLst>
             <pc:docMk/>
-            <pc:sldMk cId="77612620" sldId="261"/>
-            <ac:spMk id="5" creationId="{0F2CD688-3AE4-8F4C-FEC0-F9A43FBD9CF1}"/>
+            <pc:sldMk cId="521350829" sldId="261"/>
+            <ac:spMk id="2" creationId="{6275394B-38D7-09EE-5E91-345505E280D3}"/>
+          </ac:spMkLst>
+        </pc:spChg>
+        <pc:spChg chg="mod">
+          <ac:chgData name="Alessandro Di Piazza" userId="242384fd-1746-4b70-8d90-c83f4330e5ed" providerId="ADAL" clId="{FFF1DA74-BEAE-470B-8D8A-B7A1F3E1BF85}" dt="2026-06-03T13:43:59.359" v="141" actId="20577"/>
+          <ac:spMkLst>
+            <pc:docMk/>
+            <pc:sldMk cId="521350829" sldId="261"/>
+            <ac:spMk id="3" creationId="{3F02FAD4-2839-9160-062B-F050C1395CB1}"/>
           </ac:spMkLst>
         </pc:spChg>
       </pc:sldChg>
@@ -182,6 +206,106 @@
           <pc:docMk/>
           <pc:sldMk cId="2275532685" sldId="261"/>
         </pc:sldMkLst>
+      </pc:sldChg>
+      <pc:sldChg chg="modSp new mod ord">
+        <pc:chgData name="Alessandro Di Piazza" userId="242384fd-1746-4b70-8d90-c83f4330e5ed" providerId="ADAL" clId="{FFF1DA74-BEAE-470B-8D8A-B7A1F3E1BF85}" dt="2026-06-03T14:04:13.602" v="162"/>
+        <pc:sldMkLst>
+          <pc:docMk/>
+          <pc:sldMk cId="1077095874" sldId="262"/>
+        </pc:sldMkLst>
+        <pc:spChg chg="mod">
+          <ac:chgData name="Alessandro Di Piazza" userId="242384fd-1746-4b70-8d90-c83f4330e5ed" providerId="ADAL" clId="{FFF1DA74-BEAE-470B-8D8A-B7A1F3E1BF85}" dt="2026-06-03T14:04:13.602" v="162"/>
+          <ac:spMkLst>
+            <pc:docMk/>
+            <pc:sldMk cId="1077095874" sldId="262"/>
+            <ac:spMk id="2" creationId="{4D03C92D-17E8-EBD9-EF0E-F055E66DCF0E}"/>
+          </ac:spMkLst>
+        </pc:spChg>
+        <pc:spChg chg="mod">
+          <ac:chgData name="Alessandro Di Piazza" userId="242384fd-1746-4b70-8d90-c83f4330e5ed" providerId="ADAL" clId="{FFF1DA74-BEAE-470B-8D8A-B7A1F3E1BF85}" dt="2026-06-03T14:03:34.083" v="149" actId="21"/>
+          <ac:spMkLst>
+            <pc:docMk/>
+            <pc:sldMk cId="1077095874" sldId="262"/>
+            <ac:spMk id="3" creationId="{C75C467F-6520-59FA-C45A-B71F8E5A3C6D}"/>
+          </ac:spMkLst>
+        </pc:spChg>
+      </pc:sldChg>
+      <pc:sldChg chg="addSp delSp modSp new mod">
+        <pc:chgData name="Alessandro Di Piazza" userId="242384fd-1746-4b70-8d90-c83f4330e5ed" providerId="ADAL" clId="{FFF1DA74-BEAE-470B-8D8A-B7A1F3E1BF85}" dt="2026-06-03T14:04:15.355" v="163"/>
+        <pc:sldMkLst>
+          <pc:docMk/>
+          <pc:sldMk cId="1591876859" sldId="263"/>
+        </pc:sldMkLst>
+        <pc:spChg chg="mod">
+          <ac:chgData name="Alessandro Di Piazza" userId="242384fd-1746-4b70-8d90-c83f4330e5ed" providerId="ADAL" clId="{FFF1DA74-BEAE-470B-8D8A-B7A1F3E1BF85}" dt="2026-06-03T14:04:15.355" v="163"/>
+          <ac:spMkLst>
+            <pc:docMk/>
+            <pc:sldMk cId="1591876859" sldId="263"/>
+            <ac:spMk id="2" creationId="{926465B6-3533-3A08-5059-0FF854F9AC62}"/>
+          </ac:spMkLst>
+        </pc:spChg>
+        <pc:spChg chg="mod">
+          <ac:chgData name="Alessandro Di Piazza" userId="242384fd-1746-4b70-8d90-c83f4330e5ed" providerId="ADAL" clId="{FFF1DA74-BEAE-470B-8D8A-B7A1F3E1BF85}" dt="2026-06-03T14:03:39.660" v="153" actId="21"/>
+          <ac:spMkLst>
+            <pc:docMk/>
+            <pc:sldMk cId="1591876859" sldId="263"/>
+            <ac:spMk id="3" creationId="{BBD50271-1A7C-E68F-8EEB-58EF1B7F19CB}"/>
+          </ac:spMkLst>
+        </pc:spChg>
+        <pc:spChg chg="add del">
+          <ac:chgData name="Alessandro Di Piazza" userId="242384fd-1746-4b70-8d90-c83f4330e5ed" providerId="ADAL" clId="{FFF1DA74-BEAE-470B-8D8A-B7A1F3E1BF85}" dt="2026-06-03T14:03:36.259" v="151" actId="22"/>
+          <ac:spMkLst>
+            <pc:docMk/>
+            <pc:sldMk cId="1591876859" sldId="263"/>
+            <ac:spMk id="5" creationId="{C77CB022-6A32-581F-75DC-6140E2D8FED0}"/>
+          </ac:spMkLst>
+        </pc:spChg>
+      </pc:sldChg>
+      <pc:sldChg chg="modSp new mod">
+        <pc:chgData name="Alessandro Di Piazza" userId="242384fd-1746-4b70-8d90-c83f4330e5ed" providerId="ADAL" clId="{FFF1DA74-BEAE-470B-8D8A-B7A1F3E1BF85}" dt="2026-06-03T14:04:17.479" v="164"/>
+        <pc:sldMkLst>
+          <pc:docMk/>
+          <pc:sldMk cId="2175123048" sldId="264"/>
+        </pc:sldMkLst>
+        <pc:spChg chg="mod">
+          <ac:chgData name="Alessandro Di Piazza" userId="242384fd-1746-4b70-8d90-c83f4330e5ed" providerId="ADAL" clId="{FFF1DA74-BEAE-470B-8D8A-B7A1F3E1BF85}" dt="2026-06-03T14:04:17.479" v="164"/>
+          <ac:spMkLst>
+            <pc:docMk/>
+            <pc:sldMk cId="2175123048" sldId="264"/>
+            <ac:spMk id="2" creationId="{AAF4D005-F462-EE22-4A94-76AB7F222E95}"/>
+          </ac:spMkLst>
+        </pc:spChg>
+        <pc:spChg chg="mod">
+          <ac:chgData name="Alessandro Di Piazza" userId="242384fd-1746-4b70-8d90-c83f4330e5ed" providerId="ADAL" clId="{FFF1DA74-BEAE-470B-8D8A-B7A1F3E1BF85}" dt="2026-06-03T14:03:45.978" v="158" actId="20577"/>
+          <ac:spMkLst>
+            <pc:docMk/>
+            <pc:sldMk cId="2175123048" sldId="264"/>
+            <ac:spMk id="3" creationId="{4B175CFA-015F-13D7-7EC6-3F774033853E}"/>
+          </ac:spMkLst>
+        </pc:spChg>
+      </pc:sldChg>
+      <pc:sldChg chg="modSp new mod">
+        <pc:chgData name="Alessandro Di Piazza" userId="242384fd-1746-4b70-8d90-c83f4330e5ed" providerId="ADAL" clId="{FFF1DA74-BEAE-470B-8D8A-B7A1F3E1BF85}" dt="2026-06-03T14:04:19.498" v="165"/>
+        <pc:sldMkLst>
+          <pc:docMk/>
+          <pc:sldMk cId="323645549" sldId="265"/>
+        </pc:sldMkLst>
+        <pc:spChg chg="mod">
+          <ac:chgData name="Alessandro Di Piazza" userId="242384fd-1746-4b70-8d90-c83f4330e5ed" providerId="ADAL" clId="{FFF1DA74-BEAE-470B-8D8A-B7A1F3E1BF85}" dt="2026-06-03T14:04:19.498" v="165"/>
+          <ac:spMkLst>
+            <pc:docMk/>
+            <pc:sldMk cId="323645549" sldId="265"/>
+            <ac:spMk id="2" creationId="{768FD06D-8C3A-9EC3-0D41-ABD18F8DE1AA}"/>
+          </ac:spMkLst>
+        </pc:spChg>
+        <pc:spChg chg="mod">
+          <ac:chgData name="Alessandro Di Piazza" userId="242384fd-1746-4b70-8d90-c83f4330e5ed" providerId="ADAL" clId="{FFF1DA74-BEAE-470B-8D8A-B7A1F3E1BF85}" dt="2026-06-03T14:04:06.860" v="161" actId="5793"/>
+          <ac:spMkLst>
+            <pc:docMk/>
+            <pc:sldMk cId="323645549" sldId="265"/>
+            <ac:spMk id="3" creationId="{800EA692-CCD0-E1B2-5BC7-DD0899EEF375}"/>
+          </ac:spMkLst>
+        </pc:spChg>
       </pc:sldChg>
     </pc:docChg>
   </pc:docChgLst>
@@ -335,7 +459,7 @@
           <a:p>
             <a:fld id="{F5FEF6DB-7E10-485F-AE68-1D1FB41E5DAC}" type="datetimeFigureOut">
               <a:rPr lang="en-US" smtClean="0"/>
-              <a:t>5/29/2026</a:t>
+              <a:t>6/3/2026</a:t>
             </a:fld>
             <a:endParaRPr lang="en-US"/>
           </a:p>
@@ -533,7 +657,7 @@
           <a:p>
             <a:fld id="{F5FEF6DB-7E10-485F-AE68-1D1FB41E5DAC}" type="datetimeFigureOut">
               <a:rPr lang="en-US" smtClean="0"/>
-              <a:t>5/29/2026</a:t>
+              <a:t>6/3/2026</a:t>
             </a:fld>
             <a:endParaRPr lang="en-US"/>
           </a:p>
@@ -741,7 +865,7 @@
           <a:p>
             <a:fld id="{F5FEF6DB-7E10-485F-AE68-1D1FB41E5DAC}" type="datetimeFigureOut">
               <a:rPr lang="en-US" smtClean="0"/>
-              <a:t>5/29/2026</a:t>
+              <a:t>6/3/2026</a:t>
             </a:fld>
             <a:endParaRPr lang="en-US"/>
           </a:p>
@@ -939,7 +1063,7 @@
           <a:p>
             <a:fld id="{F5FEF6DB-7E10-485F-AE68-1D1FB41E5DAC}" type="datetimeFigureOut">
               <a:rPr lang="en-US" smtClean="0"/>
-              <a:t>5/29/2026</a:t>
+              <a:t>6/3/2026</a:t>
             </a:fld>
             <a:endParaRPr lang="en-US"/>
           </a:p>
@@ -1214,7 +1338,7 @@
           <a:p>
             <a:fld id="{F5FEF6DB-7E10-485F-AE68-1D1FB41E5DAC}" type="datetimeFigureOut">
               <a:rPr lang="en-US" smtClean="0"/>
-              <a:t>5/29/2026</a:t>
+              <a:t>6/3/2026</a:t>
             </a:fld>
             <a:endParaRPr lang="en-US"/>
           </a:p>
@@ -1479,7 +1603,7 @@
           <a:p>
             <a:fld id="{F5FEF6DB-7E10-485F-AE68-1D1FB41E5DAC}" type="datetimeFigureOut">
               <a:rPr lang="en-US" smtClean="0"/>
-              <a:t>5/29/2026</a:t>
+              <a:t>6/3/2026</a:t>
             </a:fld>
             <a:endParaRPr lang="en-US"/>
           </a:p>
@@ -1891,7 +2015,7 @@
           <a:p>
             <a:fld id="{F5FEF6DB-7E10-485F-AE68-1D1FB41E5DAC}" type="datetimeFigureOut">
               <a:rPr lang="en-US" smtClean="0"/>
-              <a:t>5/29/2026</a:t>
+              <a:t>6/3/2026</a:t>
             </a:fld>
             <a:endParaRPr lang="en-US"/>
           </a:p>
@@ -2032,7 +2156,7 @@
           <a:p>
             <a:fld id="{F5FEF6DB-7E10-485F-AE68-1D1FB41E5DAC}" type="datetimeFigureOut">
               <a:rPr lang="en-US" smtClean="0"/>
-              <a:t>5/29/2026</a:t>
+              <a:t>6/3/2026</a:t>
             </a:fld>
             <a:endParaRPr lang="en-US"/>
           </a:p>
@@ -2145,7 +2269,7 @@
           <a:p>
             <a:fld id="{F5FEF6DB-7E10-485F-AE68-1D1FB41E5DAC}" type="datetimeFigureOut">
               <a:rPr lang="en-US" smtClean="0"/>
-              <a:t>5/29/2026</a:t>
+              <a:t>6/3/2026</a:t>
             </a:fld>
             <a:endParaRPr lang="en-US"/>
           </a:p>
@@ -2456,7 +2580,7 @@
           <a:p>
             <a:fld id="{F5FEF6DB-7E10-485F-AE68-1D1FB41E5DAC}" type="datetimeFigureOut">
               <a:rPr lang="en-US" smtClean="0"/>
-              <a:t>5/29/2026</a:t>
+              <a:t>6/3/2026</a:t>
             </a:fld>
             <a:endParaRPr lang="en-US"/>
           </a:p>
@@ -2744,7 +2868,7 @@
           <a:p>
             <a:fld id="{F5FEF6DB-7E10-485F-AE68-1D1FB41E5DAC}" type="datetimeFigureOut">
               <a:rPr lang="en-US" smtClean="0"/>
-              <a:t>5/29/2026</a:t>
+              <a:t>6/3/2026</a:t>
             </a:fld>
             <a:endParaRPr lang="en-US"/>
           </a:p>
@@ -2985,7 +3109,7 @@
           <a:p>
             <a:fld id="{F5FEF6DB-7E10-485F-AE68-1D1FB41E5DAC}" type="datetimeFigureOut">
               <a:rPr lang="en-US" smtClean="0"/>
-              <a:t>5/29/2026</a:t>
+              <a:t>6/3/2026</a:t>
             </a:fld>
             <a:endParaRPr lang="en-US"/>
           </a:p>
@@ -3595,7 +3719,7 @@
         <p:spPr/>
         <p:txBody>
           <a:bodyPr>
-            <a:normAutofit fontScale="40000" lnSpcReduction="20000"/>
+            <a:normAutofit fontScale="77500" lnSpcReduction="20000"/>
           </a:bodyPr>
           <a:lstStyle/>
           <a:p>
@@ -3633,6 +3757,33 @@
               <a:rPr lang="it-IT" dirty="0"/>
               <a:t>import pandas as pd</a:t>
             </a:r>
+          </a:p>
+          <a:p>
+            <a:pPr marL="0" indent="0">
+              <a:buNone/>
+            </a:pPr>
+            <a:r>
+              <a:rPr lang="en-US" dirty="0"/>
+              <a:t>import </a:t>
+            </a:r>
+            <a:r>
+              <a:rPr lang="en-US" dirty="0" err="1"/>
+              <a:t>matplotlib.pyplot</a:t>
+            </a:r>
+            <a:r>
+              <a:rPr lang="en-US" dirty="0"/>
+              <a:t> as </a:t>
+            </a:r>
+            <a:r>
+              <a:rPr lang="en-US" dirty="0" err="1"/>
+              <a:t>plt</a:t>
+            </a:r>
+            <a:endParaRPr lang="en-US" dirty="0"/>
+          </a:p>
+          <a:p>
+            <a:pPr marL="0" indent="0">
+              <a:buNone/>
+            </a:pPr>
             <a:br>
               <a:rPr lang="it-IT" dirty="0"/>
             </a:br>
@@ -3676,60 +3827,6 @@
             <a:endParaRPr lang="it-IT" dirty="0"/>
           </a:p>
           <a:p>
-            <a:pPr>
-              <a:buNone/>
-            </a:pPr>
-            <a:r>
-              <a:rPr lang="it-IT" dirty="0"/>
-              <a:t>Creare un istogramma che mostri la distribuzione delle età.</a:t>
-            </a:r>
-          </a:p>
-          <a:p>
-            <a:pPr marL="0" indent="0">
-              <a:buNone/>
-            </a:pPr>
-            <a:endParaRPr lang="it-IT" dirty="0"/>
-          </a:p>
-          <a:p>
-            <a:pPr marL="0" indent="0">
-              <a:buNone/>
-            </a:pPr>
-            <a:r>
-              <a:rPr lang="it-IT" dirty="0"/>
-              <a:t>Visualizzare quanti passeggeri viaggiavano in:</a:t>
-            </a:r>
-          </a:p>
-          <a:p>
-            <a:r>
-              <a:rPr lang="it-IT" dirty="0"/>
-              <a:t>Prima classe </a:t>
-            </a:r>
-          </a:p>
-          <a:p>
-            <a:r>
-              <a:rPr lang="it-IT" dirty="0"/>
-              <a:t>Seconda classe </a:t>
-            </a:r>
-          </a:p>
-          <a:p>
-            <a:r>
-              <a:rPr lang="it-IT" dirty="0"/>
-              <a:t>Terza classe</a:t>
-            </a:r>
-          </a:p>
-          <a:p>
-            <a:endParaRPr lang="it-IT" dirty="0"/>
-          </a:p>
-          <a:p>
-            <a:pPr marL="0" indent="0">
-              <a:buNone/>
-            </a:pPr>
-            <a:r>
-              <a:rPr lang="it-IT" dirty="0"/>
-              <a:t>Creare un grafico a torta Sopravvissuti vs Non Sopravvissuti</a:t>
-            </a:r>
-          </a:p>
-          <a:p>
             <a:endParaRPr lang="it-IT" dirty="0"/>
           </a:p>
           <a:p>
@@ -3747,6 +3844,414 @@
     <p:extLst>
       <p:ext uri="{BB962C8B-B14F-4D97-AF65-F5344CB8AC3E}">
         <p14:creationId xmlns:p14="http://schemas.microsoft.com/office/powerpoint/2010/main" val="1849798557"/>
+      </p:ext>
+    </p:extLst>
+  </p:cSld>
+  <p:clrMapOvr>
+    <a:masterClrMapping/>
+  </p:clrMapOvr>
+</p:sld>
+</file>
+
+<file path=ppt/slides/slide3.xml><?xml version="1.0" encoding="utf-8"?>
+<p:sld xmlns:a="http://schemas.openxmlformats.org/drawingml/2006/main" xmlns:r="http://schemas.openxmlformats.org/officeDocument/2006/relationships" xmlns:p="http://schemas.openxmlformats.org/presentationml/2006/main">
+  <p:cSld>
+    <p:spTree>
+      <p:nvGrpSpPr>
+        <p:cNvPr id="1" name=""/>
+        <p:cNvGrpSpPr/>
+        <p:nvPr/>
+      </p:nvGrpSpPr>
+      <p:grpSpPr>
+        <a:xfrm>
+          <a:off x="0" y="0"/>
+          <a:ext cx="0" cy="0"/>
+          <a:chOff x="0" y="0"/>
+          <a:chExt cx="0" cy="0"/>
+        </a:xfrm>
+      </p:grpSpPr>
+      <p:sp>
+        <p:nvSpPr>
+          <p:cNvPr id="2" name="Title 1">
+            <a:extLst>
+              <a:ext uri="{FF2B5EF4-FFF2-40B4-BE49-F238E27FC236}">
+                <a16:creationId xmlns:a16="http://schemas.microsoft.com/office/drawing/2014/main" id="{4D03C92D-17E8-EBD9-EF0E-F055E66DCF0E}"/>
+              </a:ext>
+            </a:extLst>
+          </p:cNvPr>
+          <p:cNvSpPr>
+            <a:spLocks noGrp="1"/>
+          </p:cNvSpPr>
+          <p:nvPr>
+            <p:ph type="title"/>
+          </p:nvPr>
+        </p:nvSpPr>
+        <p:spPr/>
+        <p:txBody>
+          <a:bodyPr/>
+          <a:lstStyle/>
+          <a:p>
+            <a:r>
+              <a:rPr lang="it-IT" dirty="0"/>
+              <a:t>Esercizio – Mathplotlib dei passeggeri del Titanic</a:t>
+            </a:r>
+            <a:endParaRPr lang="en-US" dirty="0"/>
+          </a:p>
+        </p:txBody>
+      </p:sp>
+      <p:sp>
+        <p:nvSpPr>
+          <p:cNvPr id="3" name="Content Placeholder 2">
+            <a:extLst>
+              <a:ext uri="{FF2B5EF4-FFF2-40B4-BE49-F238E27FC236}">
+                <a16:creationId xmlns:a16="http://schemas.microsoft.com/office/drawing/2014/main" id="{C75C467F-6520-59FA-C45A-B71F8E5A3C6D}"/>
+              </a:ext>
+            </a:extLst>
+          </p:cNvPr>
+          <p:cNvSpPr>
+            <a:spLocks noGrp="1"/>
+          </p:cNvSpPr>
+          <p:nvPr>
+            <p:ph idx="1"/>
+          </p:nvPr>
+        </p:nvSpPr>
+        <p:spPr/>
+        <p:txBody>
+          <a:bodyPr/>
+          <a:lstStyle/>
+          <a:p>
+            <a:pPr>
+              <a:buNone/>
+            </a:pPr>
+            <a:r>
+              <a:rPr lang="it-IT" dirty="0"/>
+              <a:t>Creare un istogramma che mostri la distribuzione delle età.</a:t>
+            </a:r>
+          </a:p>
+          <a:p>
+            <a:pPr marL="0" indent="0">
+              <a:buNone/>
+            </a:pPr>
+            <a:endParaRPr lang="it-IT" dirty="0"/>
+          </a:p>
+          <a:p>
+            <a:endParaRPr lang="en-US" dirty="0"/>
+          </a:p>
+        </p:txBody>
+      </p:sp>
+    </p:spTree>
+    <p:extLst>
+      <p:ext uri="{BB962C8B-B14F-4D97-AF65-F5344CB8AC3E}">
+        <p14:creationId xmlns:p14="http://schemas.microsoft.com/office/powerpoint/2010/main" val="1077095874"/>
+      </p:ext>
+    </p:extLst>
+  </p:cSld>
+  <p:clrMapOvr>
+    <a:masterClrMapping/>
+  </p:clrMapOvr>
+</p:sld>
+</file>
+
+<file path=ppt/slides/slide4.xml><?xml version="1.0" encoding="utf-8"?>
+<p:sld xmlns:a="http://schemas.openxmlformats.org/drawingml/2006/main" xmlns:r="http://schemas.openxmlformats.org/officeDocument/2006/relationships" xmlns:p="http://schemas.openxmlformats.org/presentationml/2006/main">
+  <p:cSld>
+    <p:spTree>
+      <p:nvGrpSpPr>
+        <p:cNvPr id="1" name=""/>
+        <p:cNvGrpSpPr/>
+        <p:nvPr/>
+      </p:nvGrpSpPr>
+      <p:grpSpPr>
+        <a:xfrm>
+          <a:off x="0" y="0"/>
+          <a:ext cx="0" cy="0"/>
+          <a:chOff x="0" y="0"/>
+          <a:chExt cx="0" cy="0"/>
+        </a:xfrm>
+      </p:grpSpPr>
+      <p:sp>
+        <p:nvSpPr>
+          <p:cNvPr id="2" name="Title 1">
+            <a:extLst>
+              <a:ext uri="{FF2B5EF4-FFF2-40B4-BE49-F238E27FC236}">
+                <a16:creationId xmlns:a16="http://schemas.microsoft.com/office/drawing/2014/main" id="{926465B6-3533-3A08-5059-0FF854F9AC62}"/>
+              </a:ext>
+            </a:extLst>
+          </p:cNvPr>
+          <p:cNvSpPr>
+            <a:spLocks noGrp="1"/>
+          </p:cNvSpPr>
+          <p:nvPr>
+            <p:ph type="title"/>
+          </p:nvPr>
+        </p:nvSpPr>
+        <p:spPr/>
+        <p:txBody>
+          <a:bodyPr/>
+          <a:lstStyle/>
+          <a:p>
+            <a:r>
+              <a:rPr lang="it-IT" dirty="0"/>
+              <a:t>Esercizio – Mathplotlib dei passeggeri del Titanic</a:t>
+            </a:r>
+            <a:endParaRPr lang="en-US" dirty="0"/>
+          </a:p>
+        </p:txBody>
+      </p:sp>
+      <p:sp>
+        <p:nvSpPr>
+          <p:cNvPr id="3" name="Content Placeholder 2">
+            <a:extLst>
+              <a:ext uri="{FF2B5EF4-FFF2-40B4-BE49-F238E27FC236}">
+                <a16:creationId xmlns:a16="http://schemas.microsoft.com/office/drawing/2014/main" id="{BBD50271-1A7C-E68F-8EEB-58EF1B7F19CB}"/>
+              </a:ext>
+            </a:extLst>
+          </p:cNvPr>
+          <p:cNvSpPr>
+            <a:spLocks noGrp="1"/>
+          </p:cNvSpPr>
+          <p:nvPr>
+            <p:ph idx="1"/>
+          </p:nvPr>
+        </p:nvSpPr>
+        <p:spPr/>
+        <p:txBody>
+          <a:bodyPr/>
+          <a:lstStyle/>
+          <a:p>
+            <a:pPr marL="0" indent="0">
+              <a:buNone/>
+            </a:pPr>
+            <a:r>
+              <a:rPr lang="it-IT" dirty="0"/>
+              <a:t>Visualizzare quanti passeggeri viaggiavano in:</a:t>
+            </a:r>
+          </a:p>
+          <a:p>
+            <a:r>
+              <a:rPr lang="it-IT" dirty="0"/>
+              <a:t>Prima classe </a:t>
+            </a:r>
+          </a:p>
+          <a:p>
+            <a:r>
+              <a:rPr lang="it-IT" dirty="0"/>
+              <a:t>Seconda classe </a:t>
+            </a:r>
+          </a:p>
+          <a:p>
+            <a:r>
+              <a:rPr lang="it-IT" dirty="0"/>
+              <a:t>Terza classe</a:t>
+            </a:r>
+          </a:p>
+          <a:p>
+            <a:endParaRPr lang="en-US" dirty="0"/>
+          </a:p>
+        </p:txBody>
+      </p:sp>
+    </p:spTree>
+    <p:extLst>
+      <p:ext uri="{BB962C8B-B14F-4D97-AF65-F5344CB8AC3E}">
+        <p14:creationId xmlns:p14="http://schemas.microsoft.com/office/powerpoint/2010/main" val="1591876859"/>
+      </p:ext>
+    </p:extLst>
+  </p:cSld>
+  <p:clrMapOvr>
+    <a:masterClrMapping/>
+  </p:clrMapOvr>
+</p:sld>
+</file>
+
+<file path=ppt/slides/slide5.xml><?xml version="1.0" encoding="utf-8"?>
+<p:sld xmlns:a="http://schemas.openxmlformats.org/drawingml/2006/main" xmlns:r="http://schemas.openxmlformats.org/officeDocument/2006/relationships" xmlns:p="http://schemas.openxmlformats.org/presentationml/2006/main">
+  <p:cSld>
+    <p:spTree>
+      <p:nvGrpSpPr>
+        <p:cNvPr id="1" name=""/>
+        <p:cNvGrpSpPr/>
+        <p:nvPr/>
+      </p:nvGrpSpPr>
+      <p:grpSpPr>
+        <a:xfrm>
+          <a:off x="0" y="0"/>
+          <a:ext cx="0" cy="0"/>
+          <a:chOff x="0" y="0"/>
+          <a:chExt cx="0" cy="0"/>
+        </a:xfrm>
+      </p:grpSpPr>
+      <p:sp>
+        <p:nvSpPr>
+          <p:cNvPr id="2" name="Title 1">
+            <a:extLst>
+              <a:ext uri="{FF2B5EF4-FFF2-40B4-BE49-F238E27FC236}">
+                <a16:creationId xmlns:a16="http://schemas.microsoft.com/office/drawing/2014/main" id="{AAF4D005-F462-EE22-4A94-76AB7F222E95}"/>
+              </a:ext>
+            </a:extLst>
+          </p:cNvPr>
+          <p:cNvSpPr>
+            <a:spLocks noGrp="1"/>
+          </p:cNvSpPr>
+          <p:nvPr>
+            <p:ph type="title"/>
+          </p:nvPr>
+        </p:nvSpPr>
+        <p:spPr/>
+        <p:txBody>
+          <a:bodyPr/>
+          <a:lstStyle/>
+          <a:p>
+            <a:r>
+              <a:rPr lang="it-IT" dirty="0"/>
+              <a:t>Esercizio – Mathplotlib dei passeggeri del Titanic</a:t>
+            </a:r>
+            <a:endParaRPr lang="en-US" dirty="0"/>
+          </a:p>
+        </p:txBody>
+      </p:sp>
+      <p:sp>
+        <p:nvSpPr>
+          <p:cNvPr id="3" name="Content Placeholder 2">
+            <a:extLst>
+              <a:ext uri="{FF2B5EF4-FFF2-40B4-BE49-F238E27FC236}">
+                <a16:creationId xmlns:a16="http://schemas.microsoft.com/office/drawing/2014/main" id="{4B175CFA-015F-13D7-7EC6-3F774033853E}"/>
+              </a:ext>
+            </a:extLst>
+          </p:cNvPr>
+          <p:cNvSpPr>
+            <a:spLocks noGrp="1"/>
+          </p:cNvSpPr>
+          <p:nvPr>
+            <p:ph idx="1"/>
+          </p:nvPr>
+        </p:nvSpPr>
+        <p:spPr/>
+        <p:txBody>
+          <a:bodyPr/>
+          <a:lstStyle/>
+          <a:p>
+            <a:pPr marL="0" indent="0">
+              <a:buNone/>
+            </a:pPr>
+            <a:r>
+              <a:rPr lang="it-IT" dirty="0"/>
+              <a:t>Creare un grafico a torta Sopravvissuti vs Non Sopravvissuti</a:t>
+            </a:r>
+          </a:p>
+          <a:p>
+            <a:endParaRPr lang="en-US" dirty="0"/>
+          </a:p>
+        </p:txBody>
+      </p:sp>
+    </p:spTree>
+    <p:extLst>
+      <p:ext uri="{BB962C8B-B14F-4D97-AF65-F5344CB8AC3E}">
+        <p14:creationId xmlns:p14="http://schemas.microsoft.com/office/powerpoint/2010/main" val="2175123048"/>
+      </p:ext>
+    </p:extLst>
+  </p:cSld>
+  <p:clrMapOvr>
+    <a:masterClrMapping/>
+  </p:clrMapOvr>
+</p:sld>
+</file>
+
+<file path=ppt/slides/slide6.xml><?xml version="1.0" encoding="utf-8"?>
+<p:sld xmlns:a="http://schemas.openxmlformats.org/drawingml/2006/main" xmlns:r="http://schemas.openxmlformats.org/officeDocument/2006/relationships" xmlns:p="http://schemas.openxmlformats.org/presentationml/2006/main">
+  <p:cSld>
+    <p:spTree>
+      <p:nvGrpSpPr>
+        <p:cNvPr id="1" name=""/>
+        <p:cNvGrpSpPr/>
+        <p:nvPr/>
+      </p:nvGrpSpPr>
+      <p:grpSpPr>
+        <a:xfrm>
+          <a:off x="0" y="0"/>
+          <a:ext cx="0" cy="0"/>
+          <a:chOff x="0" y="0"/>
+          <a:chExt cx="0" cy="0"/>
+        </a:xfrm>
+      </p:grpSpPr>
+      <p:sp>
+        <p:nvSpPr>
+          <p:cNvPr id="2" name="Title 1">
+            <a:extLst>
+              <a:ext uri="{FF2B5EF4-FFF2-40B4-BE49-F238E27FC236}">
+                <a16:creationId xmlns:a16="http://schemas.microsoft.com/office/drawing/2014/main" id="{768FD06D-8C3A-9EC3-0D41-ABD18F8DE1AA}"/>
+              </a:ext>
+            </a:extLst>
+          </p:cNvPr>
+          <p:cNvSpPr>
+            <a:spLocks noGrp="1"/>
+          </p:cNvSpPr>
+          <p:nvPr>
+            <p:ph type="title"/>
+          </p:nvPr>
+        </p:nvSpPr>
+        <p:spPr/>
+        <p:txBody>
+          <a:bodyPr/>
+          <a:lstStyle/>
+          <a:p>
+            <a:r>
+              <a:rPr lang="it-IT" dirty="0"/>
+              <a:t>Esercizio – Mathplotlib dei passeggeri del Titanic</a:t>
+            </a:r>
+            <a:endParaRPr lang="en-US" dirty="0"/>
+          </a:p>
+        </p:txBody>
+      </p:sp>
+      <p:sp>
+        <p:nvSpPr>
+          <p:cNvPr id="3" name="Content Placeholder 2">
+            <a:extLst>
+              <a:ext uri="{FF2B5EF4-FFF2-40B4-BE49-F238E27FC236}">
+                <a16:creationId xmlns:a16="http://schemas.microsoft.com/office/drawing/2014/main" id="{800EA692-CCD0-E1B2-5BC7-DD0899EEF375}"/>
+              </a:ext>
+            </a:extLst>
+          </p:cNvPr>
+          <p:cNvSpPr>
+            <a:spLocks noGrp="1"/>
+          </p:cNvSpPr>
+          <p:nvPr>
+            <p:ph idx="1"/>
+          </p:nvPr>
+        </p:nvSpPr>
+        <p:spPr/>
+        <p:txBody>
+          <a:bodyPr/>
+          <a:lstStyle/>
+          <a:p>
+            <a:pPr marL="0" indent="0">
+              <a:buNone/>
+            </a:pPr>
+            <a:r>
+              <a:rPr lang="it-IT" dirty="0"/>
+              <a:t>Creare un grafico scatter che confronti:</a:t>
+            </a:r>
+          </a:p>
+          <a:p>
+            <a:r>
+              <a:rPr lang="it-IT" dirty="0"/>
+              <a:t>Età (Age) </a:t>
+            </a:r>
+          </a:p>
+          <a:p>
+            <a:r>
+              <a:rPr lang="it-IT" dirty="0"/>
+              <a:t>Prezzo del biglietto (Fare)</a:t>
+            </a:r>
+          </a:p>
+          <a:p>
+            <a:endParaRPr lang="en-US" dirty="0"/>
+          </a:p>
+        </p:txBody>
+      </p:sp>
+    </p:spTree>
+    <p:extLst>
+      <p:ext uri="{BB962C8B-B14F-4D97-AF65-F5344CB8AC3E}">
+        <p14:creationId xmlns:p14="http://schemas.microsoft.com/office/powerpoint/2010/main" val="323645549"/>
       </p:ext>
     </p:extLst>
   </p:cSld>
